--- a/MONTHLY_REPORT_2026-08.pptx
+++ b/MONTHLY_REPORT_2026-08.pptx
@@ -3701,7 +3701,7 @@
                 </a:solidFill>
                 <a:latin typeface="Georgia"/>
               </a:rPr>
-              <a:t>407</a:t>
+              <a:t>435</a:t>
             </a:r>
           </a:p>
         </p:txBody>
@@ -3857,7 +3857,7 @@
                 </a:solidFill>
                 <a:latin typeface="Georgia"/>
               </a:rPr>
-              <a:t>496,723</a:t>
+              <a:t>517,811</a:t>
             </a:r>
           </a:p>
         </p:txBody>
@@ -4013,7 +4013,7 @@
                 </a:solidFill>
                 <a:latin typeface="Georgia"/>
               </a:rPr>
-              <a:t>15,732</a:t>
+              <a:t>16,568</a:t>
             </a:r>
           </a:p>
         </p:txBody>
@@ -4169,7 +4169,7 @@
                 </a:solidFill>
                 <a:latin typeface="Georgia"/>
               </a:rPr>
-              <a:t>875</a:t>
+              <a:t>932</a:t>
             </a:r>
           </a:p>
         </p:txBody>
@@ -4271,7 +4271,7 @@
                 </a:solidFill>
                 <a:latin typeface="Georgia"/>
               </a:rPr>
-              <a:t>224,929 views</a:t>
+              <a:t>229,291 views</a:t>
             </a:r>
           </a:p>
         </p:txBody>
@@ -4305,7 +4305,7 @@
                 </a:solidFill>
                 <a:latin typeface="Helvetica Neue"/>
               </a:rPr>
-              <a:t>120 posts</a:t>
+              <a:t>129 posts</a:t>
             </a:r>
           </a:p>
         </p:txBody>
@@ -4373,7 +4373,7 @@
                 </a:solidFill>
                 <a:latin typeface="Georgia"/>
               </a:rPr>
-              <a:t>138,764 views</a:t>
+              <a:t>147,758 views</a:t>
             </a:r>
           </a:p>
         </p:txBody>
@@ -4407,7 +4407,7 @@
                 </a:solidFill>
                 <a:latin typeface="Helvetica Neue"/>
               </a:rPr>
-              <a:t>131 posts</a:t>
+              <a:t>140 posts</a:t>
             </a:r>
           </a:p>
         </p:txBody>
@@ -4475,7 +4475,7 @@
                 </a:solidFill>
                 <a:latin typeface="Georgia"/>
               </a:rPr>
-              <a:t>131,722 views</a:t>
+              <a:t>138,903 views</a:t>
             </a:r>
           </a:p>
         </p:txBody>
@@ -4509,7 +4509,7 @@
                 </a:solidFill>
                 <a:latin typeface="Helvetica Neue"/>
               </a:rPr>
-              <a:t>144 posts</a:t>
+              <a:t>153 posts</a:t>
             </a:r>
           </a:p>
         </p:txBody>
@@ -4577,7 +4577,7 @@
                 </a:solidFill>
                 <a:latin typeface="Georgia"/>
               </a:rPr>
-              <a:t>1,308 views</a:t>
+              <a:t>1,859 views</a:t>
             </a:r>
           </a:p>
         </p:txBody>
@@ -4611,7 +4611,7 @@
                 </a:solidFill>
                 <a:latin typeface="Helvetica Neue"/>
               </a:rPr>
-              <a:t>12 posts</a:t>
+              <a:t>13 posts</a:t>
             </a:r>
           </a:p>
         </p:txBody>
@@ -4844,7 +4844,7 @@
                 </a:solidFill>
                 <a:latin typeface="Georgia"/>
               </a:rPr>
-              <a:t>113</a:t>
+              <a:t>141</a:t>
             </a:r>
           </a:p>
         </p:txBody>
@@ -4914,7 +4914,7 @@
                 </a:solidFill>
                 <a:latin typeface="Helvetica Neue"/>
               </a:rPr>
-              <a:t>(163 in July · -31%)</a:t>
+              <a:t>(163 in July · -13%)</a:t>
             </a:r>
           </a:p>
         </p:txBody>
@@ -5070,7 +5070,7 @@
                 </a:solidFill>
                 <a:latin typeface="Georgia"/>
               </a:rPr>
-              <a:t>207,754 → 68,663</a:t>
+              <a:t>207,858 → 89,551</a:t>
             </a:r>
           </a:p>
         </p:txBody>
@@ -5104,7 +5104,7 @@
                 </a:solidFill>
                 <a:latin typeface="Helvetica Neue"/>
               </a:rPr>
-              <a:t>▼ -67%</a:t>
+              <a:t>▼ -57%</a:t>
             </a:r>
           </a:p>
         </p:txBody>
@@ -5294,7 +5294,7 @@
                 </a:solidFill>
                 <a:latin typeface="Georgia"/>
               </a:rPr>
-              <a:t>1,275 → 608</a:t>
+              <a:t>1,275 → 635</a:t>
             </a:r>
           </a:p>
         </p:txBody>
@@ -5328,7 +5328,7 @@
                 </a:solidFill>
                 <a:latin typeface="Helvetica Neue"/>
               </a:rPr>
-              <a:t>▼ -52%</a:t>
+              <a:t>▼ -50%</a:t>
             </a:r>
           </a:p>
         </p:txBody>
@@ -5742,7 +5742,7 @@
                 </a:solidFill>
                 <a:latin typeface="Helvetica Neue"/>
               </a:rPr>
-              <a:t>64 of 113 posts (57%) landed in "other" — no defined pillar.</a:t>
+              <a:t>13 different lanes got posts — the biggest carried only 23% of views.</a:t>
             </a:r>
           </a:p>
         </p:txBody>
@@ -6096,7 +6096,7 @@
                 </a:solidFill>
                 <a:latin typeface="Georgia"/>
               </a:rPr>
-              <a:t>17,459</a:t>
+              <a:t>26,453</a:t>
             </a:r>
           </a:p>
         </p:txBody>
@@ -6130,7 +6130,7 @@
                 </a:solidFill>
                 <a:latin typeface="Helvetica Neue"/>
               </a:rPr>
-              <a:t>August views (35 posts)</a:t>
+              <a:t>August views (44 posts)</a:t>
             </a:r>
           </a:p>
         </p:txBody>
@@ -6432,7 +6432,7 @@
                 </a:solidFill>
                 <a:latin typeface="Georgia"/>
               </a:rPr>
-              <a:t>21,361</a:t>
+              <a:t>25,723</a:t>
             </a:r>
           </a:p>
         </p:txBody>
@@ -6466,7 +6466,7 @@
                 </a:solidFill>
                 <a:latin typeface="Helvetica Neue"/>
               </a:rPr>
-              <a:t>August views (33 posts)</a:t>
+              <a:t>August views (42 posts)</a:t>
             </a:r>
           </a:p>
         </p:txBody>
@@ -6768,7 +6768,7 @@
                 </a:solidFill>
                 <a:latin typeface="Georgia"/>
               </a:rPr>
-              <a:t>29,645</a:t>
+              <a:t>36,826</a:t>
             </a:r>
           </a:p>
         </p:txBody>
@@ -6802,7 +6802,7 @@
                 </a:solidFill>
                 <a:latin typeface="Helvetica Neue"/>
               </a:rPr>
-              <a:t>August views (41 posts)</a:t>
+              <a:t>August views (50 posts)</a:t>
             </a:r>
           </a:p>
         </p:txBody>
@@ -7104,7 +7104,7 @@
                 </a:solidFill>
                 <a:latin typeface="Georgia"/>
               </a:rPr>
-              <a:t>198</a:t>
+              <a:t>549</a:t>
             </a:r>
           </a:p>
         </p:txBody>
@@ -7138,7 +7138,7 @@
                 </a:solidFill>
                 <a:latin typeface="Helvetica Neue"/>
               </a:rPr>
-              <a:t>August views (4 posts)</a:t>
+              <a:t>August views (5 posts)</a:t>
             </a:r>
           </a:p>
         </p:txBody>
@@ -7250,7 +7250,7 @@
                 </a:solidFill>
                 <a:latin typeface="Helvetica Neue"/>
               </a:rPr>
-              <a:t>372</a:t>
+              <a:t>476</a:t>
             </a:r>
           </a:p>
         </p:txBody>
@@ -7482,7 +7482,7 @@
                 </a:solidFill>
                 <a:latin typeface="Helvetica Neue"/>
               </a:rPr>
-              <a:t>Average views per post by category. The show explored — most posts didn't map to a defined pillar.</a:t>
+              <a:t>Average views per post by category. The show explored — reach spread across many lanes instead of one pillar.</a:t>
             </a:r>
           </a:p>
         </p:txBody>
@@ -7546,7 +7546,7 @@
             <a:avLst/>
           </a:prstGeom>
           <a:solidFill>
-            <a:srgbClr val="6B7082"/>
+            <a:srgbClr val="1B7A43"/>
           </a:solidFill>
           <a:ln>
             <a:noFill/>
@@ -7600,11 +7600,11 @@
             <a:r>
               <a:rPr sz="900" b="1">
                 <a:solidFill>
-                  <a:srgbClr val="6B7082"/>
-                </a:solidFill>
-                <a:latin typeface="Helvetica Neue"/>
-              </a:rPr>
-              <a:t>OTHER (UNMAPPED)</a:t>
+                  <a:srgbClr val="1B7A43"/>
+                </a:solidFill>
+                <a:latin typeface="Helvetica Neue"/>
+              </a:rPr>
+              <a:t>FOOD</a:t>
             </a:r>
           </a:p>
         </p:txBody>
@@ -7638,7 +7638,7 @@
                 </a:solidFill>
                 <a:latin typeface="Georgia"/>
               </a:rPr>
-              <a:t>484</a:t>
+              <a:t>1,121</a:t>
             </a:r>
           </a:p>
         </p:txBody>
@@ -7706,7 +7706,7 @@
                 </a:solidFill>
                 <a:latin typeface="Helvetica Neue"/>
               </a:rPr>
-              <a:t>64 posts · 31,008 total views</a:t>
+              <a:t>18 posts · 20,178 total views</a:t>
             </a:r>
           </a:p>
         </p:txBody>
@@ -7770,7 +7770,7 @@
             <a:avLst/>
           </a:prstGeom>
           <a:solidFill>
-            <a:srgbClr val="1B7A43"/>
+            <a:srgbClr val="2F3C7E"/>
           </a:solidFill>
           <a:ln>
             <a:noFill/>
@@ -7824,11 +7824,11 @@
             <a:r>
               <a:rPr sz="900" b="1">
                 <a:solidFill>
-                  <a:srgbClr val="1B7A43"/>
-                </a:solidFill>
-                <a:latin typeface="Helvetica Neue"/>
-              </a:rPr>
-              <a:t>FOOD</a:t>
+                  <a:srgbClr val="2F3C7E"/>
+                </a:solidFill>
+                <a:latin typeface="Helvetica Neue"/>
+              </a:rPr>
+              <a:t>JUDICIAL</a:t>
             </a:r>
           </a:p>
         </p:txBody>
@@ -7862,7 +7862,7 @@
                 </a:solidFill>
                 <a:latin typeface="Georgia"/>
               </a:rPr>
-              <a:t>1,134</a:t>
+              <a:t>466</a:t>
             </a:r>
           </a:p>
         </p:txBody>
@@ -7930,7 +7930,7 @@
                 </a:solidFill>
                 <a:latin typeface="Helvetica Neue"/>
               </a:rPr>
-              <a:t>16 posts · 18,136 total views</a:t>
+              <a:t>38 posts · 17,716 total views</a:t>
             </a:r>
           </a:p>
         </p:txBody>
@@ -8218,7 +8218,7 @@
             <a:avLst/>
           </a:prstGeom>
           <a:solidFill>
-            <a:srgbClr val="2F3C7E"/>
+            <a:srgbClr val="6B7082"/>
           </a:solidFill>
           <a:ln>
             <a:noFill/>
@@ -8272,11 +8272,11 @@
             <a:r>
               <a:rPr sz="900" b="1">
                 <a:solidFill>
-                  <a:srgbClr val="2F3C7E"/>
-                </a:solidFill>
-                <a:latin typeface="Helvetica Neue"/>
-              </a:rPr>
-              <a:t>JUDICIAL</a:t>
+                  <a:srgbClr val="6B7082"/>
+                </a:solidFill>
+                <a:latin typeface="Helvetica Neue"/>
+              </a:rPr>
+              <a:t>SPORTS</a:t>
             </a:r>
           </a:p>
         </p:txBody>
@@ -8310,7 +8310,7 @@
                 </a:solidFill>
                 <a:latin typeface="Georgia"/>
               </a:rPr>
-              <a:t>260</a:t>
+              <a:t>776</a:t>
             </a:r>
           </a:p>
         </p:txBody>
@@ -8378,7 +8378,7 @@
                 </a:solidFill>
                 <a:latin typeface="Helvetica Neue"/>
               </a:rPr>
-              <a:t>11 posts · 2,862 total views</a:t>
+              <a:t>14 posts · 10,865 total views</a:t>
             </a:r>
           </a:p>
         </p:txBody>
@@ -8500,7 +8500,7 @@
                 </a:solidFill>
                 <a:latin typeface="Helvetica Neue"/>
               </a:rPr>
-              <a:t>ELECTIONS</a:t>
+              <a:t>CITY HALL &amp; CIVIC</a:t>
             </a:r>
           </a:p>
         </p:txBody>
@@ -8534,7 +8534,7 @@
                 </a:solidFill>
                 <a:latin typeface="Georgia"/>
               </a:rPr>
-              <a:t>981</a:t>
+              <a:t>644</a:t>
             </a:r>
           </a:p>
         </p:txBody>
@@ -8602,7 +8602,7 @@
                 </a:solidFill>
                 <a:latin typeface="Helvetica Neue"/>
               </a:rPr>
-              <a:t>2 posts · 1,962 total views</a:t>
+              <a:t>13 posts · 8,369 total views</a:t>
             </a:r>
           </a:p>
         </p:txBody>
@@ -8724,7 +8724,7 @@
                 </a:solidFill>
                 <a:latin typeface="Helvetica Neue"/>
               </a:rPr>
-              <a:t>LEGISLATION WATCH</a:t>
+              <a:t>STATE POLICY</a:t>
             </a:r>
           </a:p>
         </p:txBody>
@@ -8758,7 +8758,7 @@
                 </a:solidFill>
                 <a:latin typeface="Georgia"/>
               </a:rPr>
-              <a:t>579</a:t>
+              <a:t>566</a:t>
             </a:r>
           </a:p>
         </p:txBody>
@@ -8826,7 +8826,7 @@
                 </a:solidFill>
                 <a:latin typeface="Helvetica Neue"/>
               </a:rPr>
-              <a:t>3 posts · 1,736 total views</a:t>
+              <a:t>12 posts · 6,791 total views</a:t>
             </a:r>
           </a:p>
         </p:txBody>
@@ -8890,7 +8890,7 @@
             <a:avLst/>
           </a:prstGeom>
           <a:solidFill>
-            <a:srgbClr val="2F3C7E"/>
+            <a:srgbClr val="2E86AB"/>
           </a:solidFill>
           <a:ln>
             <a:noFill/>
@@ -8944,11 +8944,11 @@
             <a:r>
               <a:rPr sz="900" b="1">
                 <a:solidFill>
-                  <a:srgbClr val="2F3C7E"/>
-                </a:solidFill>
-                <a:latin typeface="Helvetica Neue"/>
-              </a:rPr>
-              <a:t>POLITICS (OTHER)</a:t>
+                  <a:srgbClr val="2E86AB"/>
+                </a:solidFill>
+                <a:latin typeface="Helvetica Neue"/>
+              </a:rPr>
+              <a:t>LEADERSHIP &amp; LIFE</a:t>
             </a:r>
           </a:p>
         </p:txBody>
@@ -8982,7 +8982,7 @@
                 </a:solidFill>
                 <a:latin typeface="Georgia"/>
               </a:rPr>
-              <a:t>58</a:t>
+              <a:t>312</a:t>
             </a:r>
           </a:p>
         </p:txBody>
@@ -9050,7 +9050,7 @@
                 </a:solidFill>
                 <a:latin typeface="Helvetica Neue"/>
               </a:rPr>
-              <a:t>3 posts · 174 total views</a:t>
+              <a:t>15 posts · 4,686 total views</a:t>
             </a:r>
           </a:p>
         </p:txBody>
@@ -9114,7 +9114,7 @@
             <a:avLst/>
           </a:prstGeom>
           <a:solidFill>
-            <a:srgbClr val="990011"/>
+            <a:srgbClr val="2F3C7E"/>
           </a:solidFill>
           <a:ln>
             <a:noFill/>
@@ -9168,11 +9168,11 @@
             <a:r>
               <a:rPr sz="900" b="1">
                 <a:solidFill>
-                  <a:srgbClr val="990011"/>
-                </a:solidFill>
-                <a:latin typeface="Helvetica Neue"/>
-              </a:rPr>
-              <a:t>MILITARY SERVICE</a:t>
+                  <a:srgbClr val="2F3C7E"/>
+                </a:solidFill>
+                <a:latin typeface="Helvetica Neue"/>
+              </a:rPr>
+              <a:t>ELECTIONS</a:t>
             </a:r>
           </a:p>
         </p:txBody>
@@ -9206,7 +9206,7 @@
                 </a:solidFill>
                 <a:latin typeface="Georgia"/>
               </a:rPr>
-              <a:t>0</a:t>
+              <a:t>618</a:t>
             </a:r>
           </a:p>
         </p:txBody>
@@ -9274,7 +9274,7 @@
                 </a:solidFill>
                 <a:latin typeface="Helvetica Neue"/>
               </a:rPr>
-              <a:t>1 posts · 0 total views</a:t>
+              <a:t>5 posts · 3,090 total views</a:t>
             </a:r>
           </a:p>
         </p:txBody>
@@ -9308,7 +9308,7 @@
                 </a:solidFill>
                 <a:latin typeface="Helvetica Neue"/>
               </a:rPr>
-              <a:t>Food + Community Local kept working at July-comparable per-post reach. The taxonomy needs new tags to catch what "other" actually was.</a:t>
+              <a:t>Food, Judicial, Community Local led August. Sports, City Hall and State Policy showed up as real lanes — the month spread out rather than drifted.</a:t>
             </a:r>
           </a:p>
         </p:txBody>
@@ -10124,7 +10124,7 @@
                 </a:solidFill>
                 <a:latin typeface="Helvetica Neue"/>
               </a:rPr>
-              <a:t>TT</a:t>
+              <a:t>IG</a:t>
             </a:r>
           </a:p>
         </p:txBody>
@@ -10158,7 +10158,7 @@
                 </a:solidFill>
                 <a:latin typeface="Helvetica Neue"/>
               </a:rPr>
-              <a:t>Downey is a built-out city, but Sacramento requires us to build 6,100 new h</a:t>
+              <a:t>A candidate's DSA membership raises questions about their loyalties. Pledgi</a:t>
             </a:r>
           </a:p>
         </p:txBody>
@@ -10192,7 +10192,7 @@
                 </a:solidFill>
                 <a:latin typeface="Helvetica Neue"/>
               </a:rPr>
-              <a:t>3,520</a:t>
+              <a:t>4,046</a:t>
             </a:r>
           </a:p>
         </p:txBody>
@@ -10226,7 +10226,7 @@
                 </a:solidFill>
                 <a:latin typeface="Helvetica Neue"/>
               </a:rPr>
-              <a:t>107</a:t>
+              <a:t>244</a:t>
             </a:r>
           </a:p>
         </p:txBody>
@@ -10260,7 +10260,7 @@
                 </a:solidFill>
                 <a:latin typeface="Helvetica Neue"/>
               </a:rPr>
-              <a:t>Community Local</a:t>
+              <a:t>Judicial</a:t>
             </a:r>
           </a:p>
         </p:txBody>
@@ -10406,7 +10406,7 @@
                 </a:solidFill>
                 <a:latin typeface="Helvetica Neue"/>
               </a:rPr>
-              <a:t>My Home Chinese food review: Mongolian beef, dumplings, orange chicken, and</a:t>
+              <a:t>Downey is a built-out city, but Sacramento requires us to build 6,100 new h</a:t>
             </a:r>
           </a:p>
         </p:txBody>
@@ -10440,7 +10440,7 @@
                 </a:solidFill>
                 <a:latin typeface="Helvetica Neue"/>
               </a:rPr>
-              <a:t>2,900</a:t>
+              <a:t>3,520</a:t>
             </a:r>
           </a:p>
         </p:txBody>
@@ -10474,7 +10474,7 @@
                 </a:solidFill>
                 <a:latin typeface="Helvetica Neue"/>
               </a:rPr>
-              <a:t>125</a:t>
+              <a:t>107</a:t>
             </a:r>
           </a:p>
         </p:txBody>
@@ -10508,7 +10508,7 @@
                 </a:solidFill>
                 <a:latin typeface="Helvetica Neue"/>
               </a:rPr>
-              <a:t>Food</a:t>
+              <a:t>Community Local</a:t>
             </a:r>
           </a:p>
         </p:txBody>
@@ -10620,7 +10620,7 @@
                 </a:solidFill>
                 <a:latin typeface="Helvetica Neue"/>
               </a:rPr>
-              <a:t>FB</a:t>
+              <a:t>TT</a:t>
             </a:r>
           </a:p>
         </p:txBody>
@@ -10654,7 +10654,7 @@
                 </a:solidFill>
                 <a:latin typeface="Helvetica Neue"/>
               </a:rPr>
-              <a:t>A proposed 145-unit residential condominium project on 6.1 acres is raising</a:t>
+              <a:t>My Home Chinese food review: Mongolian beef, dumplings, orange chicken, and</a:t>
             </a:r>
           </a:p>
         </p:txBody>
@@ -10688,7 +10688,7 @@
                 </a:solidFill>
                 <a:latin typeface="Helvetica Neue"/>
               </a:rPr>
-              <a:t>2,225</a:t>
+              <a:t>2,900</a:t>
             </a:r>
           </a:p>
         </p:txBody>
@@ -10722,7 +10722,7 @@
                 </a:solidFill>
                 <a:latin typeface="Helvetica Neue"/>
               </a:rPr>
-              <a:t>9</a:t>
+              <a:t>125</a:t>
             </a:r>
           </a:p>
         </p:txBody>
@@ -10756,7 +10756,7 @@
                 </a:solidFill>
                 <a:latin typeface="Helvetica Neue"/>
               </a:rPr>
-              <a:t>Community Local</a:t>
+              <a:t>Food</a:t>
             </a:r>
           </a:p>
         </p:txBody>
@@ -10824,7 +10824,7 @@
                 </a:solidFill>
                 <a:latin typeface="Helvetica Neue"/>
               </a:rPr>
-              <a:t>FB</a:t>
+              <a:t>TT</a:t>
             </a:r>
           </a:p>
         </p:txBody>
@@ -10858,7 +10858,7 @@
                 </a:solidFill>
                 <a:latin typeface="Helvetica Neue"/>
               </a:rPr>
-              <a:t>Stuck on Fairford for nearly two and a half hours today. What started quiet</a:t>
+              <a:t>UCLA forever! Lifetime member since the 80s, and yes, the mixed marriage (w</a:t>
             </a:r>
           </a:p>
         </p:txBody>
@@ -10892,7 +10892,7 @@
                 </a:solidFill>
                 <a:latin typeface="Helvetica Neue"/>
               </a:rPr>
-              <a:t>1,635</a:t>
+              <a:t>2,269</a:t>
             </a:r>
           </a:p>
         </p:txBody>
@@ -10926,7 +10926,7 @@
                 </a:solidFill>
                 <a:latin typeface="Helvetica Neue"/>
               </a:rPr>
-              <a:t>7</a:t>
+              <a:t>138</a:t>
             </a:r>
           </a:p>
         </p:txBody>
@@ -10960,7 +10960,7 @@
                 </a:solidFill>
                 <a:latin typeface="Helvetica Neue"/>
               </a:rPr>
-              <a:t>Other</a:t>
+              <a:t>Sports</a:t>
             </a:r>
           </a:p>
         </p:txBody>
@@ -11072,7 +11072,7 @@
                 </a:solidFill>
                 <a:latin typeface="Helvetica Neue"/>
               </a:rPr>
-              <a:t>TT</a:t>
+              <a:t>FB</a:t>
             </a:r>
           </a:p>
         </p:txBody>
@@ -11106,7 +11106,7 @@
                 </a:solidFill>
                 <a:latin typeface="Helvetica Neue"/>
               </a:rPr>
-              <a:t>UCLA forever! Lifetime member since the 80s, and yes, the mixed marriage (w</a:t>
+              <a:t>The Newsom administration and Rob Bonta's lawsuit against the federal gover</a:t>
             </a:r>
           </a:p>
         </p:txBody>
@@ -11140,7 +11140,7 @@
                 </a:solidFill>
                 <a:latin typeface="Helvetica Neue"/>
               </a:rPr>
-              <a:t>1,484</a:t>
+              <a:t>2,253</a:t>
             </a:r>
           </a:p>
         </p:txBody>
@@ -11174,7 +11174,7 @@
                 </a:solidFill>
                 <a:latin typeface="Helvetica Neue"/>
               </a:rPr>
-              <a:t>96</a:t>
+              <a:t>99</a:t>
             </a:r>
           </a:p>
         </p:txBody>
@@ -11208,7 +11208,7 @@
                 </a:solidFill>
                 <a:latin typeface="Helvetica Neue"/>
               </a:rPr>
-              <a:t>Other</a:t>
+              <a:t>Political Individual H</a:t>
             </a:r>
           </a:p>
         </p:txBody>
@@ -11310,7 +11310,7 @@
                 </a:solidFill>
                 <a:latin typeface="Helvetica Neue"/>
               </a:rPr>
-              <a:t>Discover the surprising truth about the NFL's structure. Learn how a losing</a:t>
+              <a:t>A proposed 145-unit residential condominium project on 6.1 acres is raising</a:t>
             </a:r>
           </a:p>
         </p:txBody>
@@ -11344,7 +11344,7 @@
                 </a:solidFill>
                 <a:latin typeface="Helvetica Neue"/>
               </a:rPr>
-              <a:t>1,459</a:t>
+              <a:t>2,225</a:t>
             </a:r>
           </a:p>
         </p:txBody>
@@ -11378,7 +11378,7 @@
                 </a:solidFill>
                 <a:latin typeface="Helvetica Neue"/>
               </a:rPr>
-              <a:t>1</a:t>
+              <a:t>9</a:t>
             </a:r>
           </a:p>
         </p:txBody>
@@ -11412,7 +11412,7 @@
                 </a:solidFill>
                 <a:latin typeface="Helvetica Neue"/>
               </a:rPr>
-              <a:t>Other</a:t>
+              <a:t>Community Local</a:t>
             </a:r>
           </a:p>
         </p:txBody>
@@ -11558,7 +11558,7 @@
                 </a:solidFill>
                 <a:latin typeface="Helvetica Neue"/>
               </a:rPr>
-              <a:t>Downtown Downey has some incredible spots, and La Chula Mexican Food is one</a:t>
+              <a:t>Stuck on Fairford for nearly two and a half hours today. What started quiet</a:t>
             </a:r>
           </a:p>
         </p:txBody>
@@ -11592,7 +11592,7 @@
                 </a:solidFill>
                 <a:latin typeface="Helvetica Neue"/>
               </a:rPr>
-              <a:t>1,448</a:t>
+              <a:t>1,635</a:t>
             </a:r>
           </a:p>
         </p:txBody>
@@ -11660,7 +11660,7 @@
                 </a:solidFill>
                 <a:latin typeface="Helvetica Neue"/>
               </a:rPr>
-              <a:t>Food</a:t>
+              <a:t>City Governance</a:t>
             </a:r>
           </a:p>
         </p:txBody>
@@ -11902,7 +11902,7 @@
                 </a:solidFill>
                 <a:latin typeface="Helvetica Neue"/>
               </a:rPr>
-              <a:t>August was intentional exploration. No scandal chased, no viral event to ride. The reels grind held, the catalog grew, and food + community lanes kept per-post reach comparable to July. The pillar to reclaim in September isn't necessarily heat — it's any pillar. 57% "other" means the show drifted without a spine.</a:t>
+              <a:t>August was intentional exploration. No scandal chased, no viral event to ride. The reels grind held, the catalog grew, and food + community lanes kept per-post reach comparable to July. The pillar to reclaim in September isn't necessarily heat — it's any pillar. Posts spread across 13 lanes with none carrying the month.</a:t>
             </a:r>
           </a:p>
         </p:txBody>
@@ -11936,7 +11936,7 @@
                 </a:solidFill>
                 <a:latin typeface="Helvetica Neue"/>
               </a:rPr>
-              <a:t>—  July posts: 163  →  August posts: 113 (volume mostly held)</a:t>
+              <a:t>—  July posts: 163  →  August posts: 141 (volume mostly held)</a:t>
             </a:r>
           </a:p>
         </p:txBody>
@@ -11970,7 +11970,7 @@
                 </a:solidFill>
                 <a:latin typeface="Helvetica Neue"/>
               </a:rPr>
-              <a:t>—  Total reach softened −67% — 207,754 → 68,663 views</a:t>
+              <a:t>—  Total reach softened -57% — 207,858 → 89,551 views</a:t>
             </a:r>
           </a:p>
         </p:txBody>
@@ -12038,7 +12038,7 @@
                 </a:solidFill>
                 <a:latin typeface="Helvetica Neue"/>
               </a:rPr>
-              <a:t>—  Strongest lane (excl. "other"): Food — 16 posts, 18,136 total views</a:t>
+              <a:t>—  Strongest lane (excl. "other"): Food — 18 posts, 20,178 total views</a:t>
             </a:r>
           </a:p>
         </p:txBody>
@@ -12140,7 +12140,7 @@
                 </a:solidFill>
                 <a:latin typeface="Helvetica Neue"/>
               </a:rPr>
-              <a:t>—  Cumulative since June 8: 407 posts · 496,723 views</a:t>
+              <a:t>—  Cumulative since June 8: 435 posts · 517,811 views</a:t>
             </a:r>
           </a:p>
         </p:txBody>
